--- a/ressources/Guide Utilisateur.pptx
+++ b/ressources/Guide Utilisateur.pptx
@@ -123,6 +123,11 @@
       </a:defRPr>
     </a:lvl9pPr>
   </p:defaultTextStyle>
+  <p:extLst>
+    <p:ext uri="{EFAFB233-063F-42B5-8137-9DF3F51BA10A}">
+      <p15:sldGuideLst xmlns:p15="http://schemas.microsoft.com/office/powerpoint/2012/main"/>
+    </p:ext>
+  </p:extLst>
 </p:presentation>
 </file>
 
@@ -273,7 +278,7 @@
           <a:p>
             <a:fld id="{4E34ECA3-ED94-41F7-AE77-7AC60D7923F7}" type="datetimeFigureOut">
               <a:rPr lang="fr-FR" smtClean="0"/>
-              <a:t>13/05/2026</a:t>
+              <a:t>19/05/2026</a:t>
             </a:fld>
             <a:endParaRPr lang="fr-FR"/>
           </a:p>
@@ -471,7 +476,7 @@
           <a:p>
             <a:fld id="{4E34ECA3-ED94-41F7-AE77-7AC60D7923F7}" type="datetimeFigureOut">
               <a:rPr lang="fr-FR" smtClean="0"/>
-              <a:t>13/05/2026</a:t>
+              <a:t>19/05/2026</a:t>
             </a:fld>
             <a:endParaRPr lang="fr-FR"/>
           </a:p>
@@ -679,7 +684,7 @@
           <a:p>
             <a:fld id="{4E34ECA3-ED94-41F7-AE77-7AC60D7923F7}" type="datetimeFigureOut">
               <a:rPr lang="fr-FR" smtClean="0"/>
-              <a:t>13/05/2026</a:t>
+              <a:t>19/05/2026</a:t>
             </a:fld>
             <a:endParaRPr lang="fr-FR"/>
           </a:p>
@@ -877,7 +882,7 @@
           <a:p>
             <a:fld id="{4E34ECA3-ED94-41F7-AE77-7AC60D7923F7}" type="datetimeFigureOut">
               <a:rPr lang="fr-FR" smtClean="0"/>
-              <a:t>13/05/2026</a:t>
+              <a:t>19/05/2026</a:t>
             </a:fld>
             <a:endParaRPr lang="fr-FR"/>
           </a:p>
@@ -1152,7 +1157,7 @@
           <a:p>
             <a:fld id="{4E34ECA3-ED94-41F7-AE77-7AC60D7923F7}" type="datetimeFigureOut">
               <a:rPr lang="fr-FR" smtClean="0"/>
-              <a:t>13/05/2026</a:t>
+              <a:t>19/05/2026</a:t>
             </a:fld>
             <a:endParaRPr lang="fr-FR"/>
           </a:p>
@@ -1417,7 +1422,7 @@
           <a:p>
             <a:fld id="{4E34ECA3-ED94-41F7-AE77-7AC60D7923F7}" type="datetimeFigureOut">
               <a:rPr lang="fr-FR" smtClean="0"/>
-              <a:t>13/05/2026</a:t>
+              <a:t>19/05/2026</a:t>
             </a:fld>
             <a:endParaRPr lang="fr-FR"/>
           </a:p>
@@ -1829,7 +1834,7 @@
           <a:p>
             <a:fld id="{4E34ECA3-ED94-41F7-AE77-7AC60D7923F7}" type="datetimeFigureOut">
               <a:rPr lang="fr-FR" smtClean="0"/>
-              <a:t>13/05/2026</a:t>
+              <a:t>19/05/2026</a:t>
             </a:fld>
             <a:endParaRPr lang="fr-FR"/>
           </a:p>
@@ -1970,7 +1975,7 @@
           <a:p>
             <a:fld id="{4E34ECA3-ED94-41F7-AE77-7AC60D7923F7}" type="datetimeFigureOut">
               <a:rPr lang="fr-FR" smtClean="0"/>
-              <a:t>13/05/2026</a:t>
+              <a:t>19/05/2026</a:t>
             </a:fld>
             <a:endParaRPr lang="fr-FR"/>
           </a:p>
@@ -2083,7 +2088,7 @@
           <a:p>
             <a:fld id="{4E34ECA3-ED94-41F7-AE77-7AC60D7923F7}" type="datetimeFigureOut">
               <a:rPr lang="fr-FR" smtClean="0"/>
-              <a:t>13/05/2026</a:t>
+              <a:t>19/05/2026</a:t>
             </a:fld>
             <a:endParaRPr lang="fr-FR"/>
           </a:p>
@@ -2394,7 +2399,7 @@
           <a:p>
             <a:fld id="{4E34ECA3-ED94-41F7-AE77-7AC60D7923F7}" type="datetimeFigureOut">
               <a:rPr lang="fr-FR" smtClean="0"/>
-              <a:t>13/05/2026</a:t>
+              <a:t>19/05/2026</a:t>
             </a:fld>
             <a:endParaRPr lang="fr-FR"/>
           </a:p>
@@ -2682,7 +2687,7 @@
           <a:p>
             <a:fld id="{4E34ECA3-ED94-41F7-AE77-7AC60D7923F7}" type="datetimeFigureOut">
               <a:rPr lang="fr-FR" smtClean="0"/>
-              <a:t>13/05/2026</a:t>
+              <a:t>19/05/2026</a:t>
             </a:fld>
             <a:endParaRPr lang="fr-FR"/>
           </a:p>
@@ -2923,7 +2928,7 @@
           <a:p>
             <a:fld id="{4E34ECA3-ED94-41F7-AE77-7AC60D7923F7}" type="datetimeFigureOut">
               <a:rPr lang="fr-FR" smtClean="0"/>
-              <a:t>13/05/2026</a:t>
+              <a:t>19/05/2026</a:t>
             </a:fld>
             <a:endParaRPr lang="fr-FR"/>
           </a:p>
@@ -7502,20 +7507,8 @@
               <a:buAutoNum type="arabicPeriod"/>
             </a:pPr>
             <a:r>
-              <a:rPr lang="en-US" sz="2200" dirty="0"/>
-              <a:t>Toute les information </a:t>
-            </a:r>
-            <a:r>
-              <a:rPr lang="en-US" sz="2200" dirty="0" err="1"/>
-              <a:t>liée</a:t>
-            </a:r>
-            <a:r>
-              <a:rPr lang="en-US" sz="2200" dirty="0"/>
-              <a:t> à </a:t>
-            </a:r>
-            <a:r>
-              <a:rPr lang="en-US" sz="2200" dirty="0" err="1"/>
-              <a:t>l’intervenant</a:t>
+              <a:rPr lang="fr-FR" sz="2200" dirty="0"/>
+              <a:t>Toutes les informations liées à l’intervenant</a:t>
             </a:r>
             <a:endParaRPr lang="en-US" sz="2200" dirty="0"/>
           </a:p>
@@ -7529,7 +7522,7 @@
             </a:r>
             <a:r>
               <a:rPr lang="en-US" sz="2200" dirty="0" err="1"/>
-              <a:t>enseigné</a:t>
+              <a:t>enseignés</a:t>
             </a:r>
             <a:endParaRPr lang="en-US" sz="2200" dirty="0"/>
           </a:p>
@@ -8162,24 +8155,8 @@
               <a:buAutoNum type="arabicPeriod"/>
             </a:pPr>
             <a:r>
-              <a:rPr lang="en-US" sz="1800" dirty="0" err="1"/>
-              <a:t>Liste</a:t>
-            </a:r>
-            <a:r>
-              <a:rPr lang="en-US" sz="1800" dirty="0"/>
-              <a:t> des interventions </a:t>
-            </a:r>
-            <a:r>
-              <a:rPr lang="en-US" sz="1800" dirty="0" err="1"/>
-              <a:t>lié</a:t>
-            </a:r>
-            <a:r>
-              <a:rPr lang="en-US" sz="1800" dirty="0"/>
-              <a:t> à </a:t>
-            </a:r>
-            <a:r>
-              <a:rPr lang="en-US" sz="1800" dirty="0" err="1"/>
-              <a:t>l’enseignants</a:t>
+              <a:rPr lang="fr-FR" sz="1800" dirty="0"/>
+              <a:t>Liste des interventions liées à l'enseignant</a:t>
             </a:r>
             <a:endParaRPr lang="en-US" sz="1800" dirty="0"/>
           </a:p>
@@ -8193,7 +8170,7 @@
             </a:r>
             <a:r>
               <a:rPr lang="en-US" sz="1800" dirty="0" err="1"/>
-              <a:t>enseigné</a:t>
+              <a:t>enseignés</a:t>
             </a:r>
             <a:r>
               <a:rPr lang="en-US" sz="1800" dirty="0"/>
@@ -9614,7 +9591,7 @@
             </a:pPr>
             <a:r>
               <a:rPr lang="en-US" sz="2200" dirty="0"/>
-              <a:t>2. Retour a la </a:t>
+              <a:t>2. Retour à la </a:t>
             </a:r>
             <a:r>
               <a:rPr lang="en-US" sz="2200" dirty="0" err="1"/>
@@ -9622,7 +9599,7 @@
             </a:r>
             <a:r>
               <a:rPr lang="en-US" sz="2200" dirty="0"/>
-              <a:t> des module</a:t>
+              <a:t> des modules</a:t>
             </a:r>
           </a:p>
         </p:txBody>
@@ -10263,7 +10240,7 @@
             </a:r>
             <a:r>
               <a:rPr lang="en-US" sz="2200" dirty="0" err="1"/>
-              <a:t>apporté</a:t>
+              <a:t>apportées</a:t>
             </a:r>
             <a:r>
               <a:rPr lang="en-US" sz="2200" dirty="0"/>
@@ -10284,7 +10261,7 @@
             </a:r>
             <a:r>
               <a:rPr lang="en-US" sz="2200" dirty="0" err="1"/>
-              <a:t>séléctionné</a:t>
+              <a:t>sélectionné</a:t>
             </a:r>
             <a:endParaRPr lang="en-US" sz="2200" dirty="0"/>
           </a:p>
@@ -12301,8 +12278,25 @@
                   </a:schemeClr>
                 </a:solidFill>
               </a:rPr>
-              <a:t>Entrez un E-mail et un mot de passe pour se connecter sur la platform</a:t>
-            </a:r>
+              <a:t>Entrez un E-mail et un mot de passe pour se connecter sur la </a:t>
+            </a:r>
+            <a:r>
+              <a:rPr lang="en-US" sz="2000" dirty="0" err="1">
+                <a:solidFill>
+                  <a:schemeClr val="tx1">
+                    <a:alpha val="60000"/>
+                  </a:schemeClr>
+                </a:solidFill>
+              </a:rPr>
+              <a:t>platforme</a:t>
+            </a:r>
+            <a:endParaRPr lang="en-US" sz="2000" dirty="0">
+              <a:solidFill>
+                <a:schemeClr val="tx1">
+                  <a:alpha val="60000"/>
+                </a:schemeClr>
+              </a:solidFill>
+            </a:endParaRPr>
           </a:p>
         </p:txBody>
       </p:sp>
@@ -13510,12 +13504,8 @@
               <a:buAutoNum type="arabicPeriod"/>
             </a:pPr>
             <a:r>
-              <a:rPr lang="en-US" sz="1800" dirty="0" err="1"/>
-              <a:t>Liste</a:t>
-            </a:r>
-            <a:r>
-              <a:rPr lang="en-US" sz="1800" dirty="0"/>
-              <a:t> de toute les interventions</a:t>
+              <a:rPr lang="fr-FR" sz="1800" dirty="0"/>
+              <a:t>Liste de toutes les interventions</a:t>
             </a:r>
           </a:p>
           <a:p>
@@ -13523,29 +13513,10 @@
               <a:buAutoNum type="arabicPeriod"/>
             </a:pPr>
             <a:r>
-              <a:rPr lang="en-US" sz="1800" dirty="0" err="1"/>
-              <a:t>Permet</a:t>
-            </a:r>
-            <a:r>
-              <a:rPr lang="en-US" sz="1800" dirty="0"/>
-              <a:t> </a:t>
-            </a:r>
-            <a:r>
-              <a:rPr lang="en-US" sz="1800" dirty="0" err="1"/>
-              <a:t>d’ajouter</a:t>
-            </a:r>
-            <a:r>
-              <a:rPr lang="en-US" sz="1800" dirty="0"/>
-              <a:t> </a:t>
-            </a:r>
-            <a:r>
-              <a:rPr lang="en-US" sz="1800" dirty="0" err="1"/>
-              <a:t>une</a:t>
-            </a:r>
-            <a:r>
-              <a:rPr lang="en-US" sz="1800" dirty="0"/>
-              <a:t> nouvelle intervention</a:t>
-            </a:r>
+              <a:rPr lang="fr-FR" sz="1800" dirty="0"/>
+              <a:t>Permet d’ajouter une nouvelle intervention</a:t>
+            </a:r>
+            <a:endParaRPr lang="en-US" sz="1800" dirty="0"/>
           </a:p>
         </p:txBody>
       </p:sp>
@@ -14945,7 +14916,7 @@
             </a:r>
             <a:r>
               <a:rPr lang="en-US" sz="1800" dirty="0"/>
-              <a:t> des intervention </a:t>
+              <a:t> des interventions </a:t>
             </a:r>
             <a:r>
               <a:rPr lang="en-US" sz="1800" dirty="0" err="1"/>
@@ -14958,40 +14929,8 @@
               <a:buAutoNum type="arabicPeriod"/>
             </a:pPr>
             <a:r>
-              <a:rPr lang="en-US" sz="1800" dirty="0" err="1"/>
-              <a:t>Permet</a:t>
-            </a:r>
-            <a:r>
-              <a:rPr lang="en-US" sz="1800" dirty="0"/>
-              <a:t> de voir les </a:t>
-            </a:r>
-            <a:r>
-              <a:rPr lang="en-US" sz="1800" dirty="0" err="1"/>
-              <a:t>informations</a:t>
-            </a:r>
-            <a:r>
-              <a:rPr lang="en-US" sz="1800" dirty="0"/>
-              <a:t> de </a:t>
-            </a:r>
-            <a:r>
-              <a:rPr lang="en-US" sz="1800" dirty="0" err="1"/>
-              <a:t>chaque</a:t>
-            </a:r>
-            <a:r>
-              <a:rPr lang="en-US" sz="1800" dirty="0"/>
-              <a:t> intervention et de les modifies </a:t>
-            </a:r>
-            <a:r>
-              <a:rPr lang="en-US" sz="1800" dirty="0" err="1"/>
-              <a:t>ou</a:t>
-            </a:r>
-            <a:r>
-              <a:rPr lang="en-US" sz="1800" dirty="0"/>
-              <a:t> </a:t>
-            </a:r>
-            <a:r>
-              <a:rPr lang="en-US" sz="1800" dirty="0" err="1"/>
-              <a:t>supprimer</a:t>
+              <a:rPr lang="fr-FR" sz="1800" dirty="0"/>
+              <a:t>Permet de voir les informations de chaque intervention et de les modifier ou supprimer</a:t>
             </a:r>
             <a:endParaRPr lang="en-US" sz="1800" dirty="0"/>
           </a:p>
